--- a/docs/PourAccord_PitchDeck_v2.pptx
+++ b/docs/PourAccord_PitchDeck_v2.pptx
@@ -2253,7 +2253,7 @@
         <p:spPr>
           <a:xfrm>
             <a:off x="457200" y="1737360"/>
-            <a:ext cx="2011680" cy="2834640"/>
+            <a:ext cx="2011680" cy="1978429"/>
           </a:xfrm>
           <a:prstGeom prst="rect">
             <a:avLst/>
@@ -2280,7 +2280,7 @@
         <p:spPr>
           <a:xfrm>
             <a:off x="457200" y="1737360"/>
-            <a:ext cx="64008" cy="2834640"/>
+            <a:ext cx="64008" cy="1980000"/>
           </a:xfrm>
           <a:prstGeom prst="rect">
             <a:avLst/>
@@ -2419,7 +2419,7 @@
         <p:spPr>
           <a:xfrm>
             <a:off x="2606040" y="1737360"/>
-            <a:ext cx="2011680" cy="2834640"/>
+            <a:ext cx="2011680" cy="1978429"/>
           </a:xfrm>
           <a:prstGeom prst="rect">
             <a:avLst/>
@@ -2446,7 +2446,7 @@
         <p:spPr>
           <a:xfrm>
             <a:off x="2606040" y="1737360"/>
-            <a:ext cx="64008" cy="2834640"/>
+            <a:ext cx="64008" cy="1980000"/>
           </a:xfrm>
           <a:prstGeom prst="rect">
             <a:avLst/>
@@ -2585,7 +2585,7 @@
         <p:spPr>
           <a:xfrm>
             <a:off x="4754880" y="1737360"/>
-            <a:ext cx="2011680" cy="2834640"/>
+            <a:ext cx="2011680" cy="1978429"/>
           </a:xfrm>
           <a:prstGeom prst="rect">
             <a:avLst/>
@@ -2612,7 +2612,7 @@
         <p:spPr>
           <a:xfrm>
             <a:off x="4754880" y="1737360"/>
-            <a:ext cx="64008" cy="2834640"/>
+            <a:ext cx="64008" cy="1980000"/>
           </a:xfrm>
           <a:prstGeom prst="rect">
             <a:avLst/>
@@ -2711,7 +2711,7 @@
               <a:buNone/>
             </a:pPr>
             <a:r>
-              <a:rPr lang="en-US" sz="1100" dirty="0">
+              <a:rPr lang="fr-FR" sz="1100" dirty="0">
                 <a:solidFill>
                   <a:srgbClr val="64748B"/>
                 </a:solidFill>
@@ -2721,14 +2721,14 @@
               </a:rPr>
               <a:t>Fiches de paie ou pièces</a:t>
             </a:r>
-            <a:endParaRPr lang="en-US" sz="1100" dirty="0"/>
+            <a:endParaRPr lang="fr-FR" sz="1100" dirty="0"/>
           </a:p>
           <a:p>
             <a:pPr marL="0" indent="0">
               <a:buNone/>
             </a:pPr>
             <a:r>
-              <a:rPr lang="en-US" sz="1100" dirty="0" err="1">
+              <a:rPr lang="fr-FR" sz="1100" dirty="0">
                 <a:solidFill>
                   <a:srgbClr val="64748B"/>
                 </a:solidFill>
@@ -2736,64 +2736,9 @@
                 <a:ea typeface="Calibri" pitchFamily="34" charset="-122"/>
                 <a:cs typeface="Calibri" pitchFamily="34" charset="-120"/>
               </a:rPr>
-              <a:t>falsifiées</a:t>
-            </a:r>
-            <a:r>
-              <a:rPr lang="en-US" sz="1100" dirty="0">
-                <a:solidFill>
-                  <a:srgbClr val="64748B"/>
-                </a:solidFill>
-                <a:latin typeface="Calibri" pitchFamily="34" charset="0"/>
-                <a:ea typeface="Calibri" pitchFamily="34" charset="-122"/>
-                <a:cs typeface="Calibri" pitchFamily="34" charset="-120"/>
-              </a:rPr>
-              <a:t> de plus </a:t>
-            </a:r>
-            <a:r>
-              <a:rPr lang="en-US" sz="1100" dirty="0" err="1">
-                <a:solidFill>
-                  <a:srgbClr val="64748B"/>
-                </a:solidFill>
-                <a:latin typeface="Calibri" pitchFamily="34" charset="0"/>
-                <a:ea typeface="Calibri" pitchFamily="34" charset="-122"/>
-                <a:cs typeface="Calibri" pitchFamily="34" charset="-120"/>
-              </a:rPr>
-              <a:t>en</a:t>
-            </a:r>
-            <a:r>
-              <a:rPr lang="en-US" sz="1100" dirty="0">
-                <a:solidFill>
-                  <a:srgbClr val="64748B"/>
-                </a:solidFill>
-                <a:latin typeface="Calibri" pitchFamily="34" charset="0"/>
-                <a:ea typeface="Calibri" pitchFamily="34" charset="-122"/>
-                <a:cs typeface="Calibri" pitchFamily="34" charset="-120"/>
-              </a:rPr>
-              <a:t> plus </a:t>
-            </a:r>
-            <a:r>
-              <a:rPr lang="en-US" sz="1100" dirty="0" err="1">
-                <a:solidFill>
-                  <a:srgbClr val="64748B"/>
-                </a:solidFill>
-                <a:latin typeface="Calibri" pitchFamily="34" charset="0"/>
-                <a:ea typeface="Calibri" pitchFamily="34" charset="-122"/>
-                <a:cs typeface="Calibri" pitchFamily="34" charset="-120"/>
-              </a:rPr>
-              <a:t>difficiles</a:t>
-            </a:r>
-            <a:r>
-              <a:rPr lang="en-US" sz="1100" dirty="0">
-                <a:solidFill>
-                  <a:srgbClr val="64748B"/>
-                </a:solidFill>
-                <a:latin typeface="Calibri" pitchFamily="34" charset="0"/>
-                <a:ea typeface="Calibri" pitchFamily="34" charset="-122"/>
-                <a:cs typeface="Calibri" pitchFamily="34" charset="-120"/>
-              </a:rPr>
-              <a:t> à repérer</a:t>
-            </a:r>
-            <a:endParaRPr lang="en-US" sz="1100" dirty="0"/>
+              <a:t>falsifiées de plus en plus difficiles à repérer</a:t>
+            </a:r>
+            <a:endParaRPr lang="fr-FR" sz="1100" dirty="0"/>
           </a:p>
         </p:txBody>
       </p:sp>
@@ -2806,7 +2751,7 @@
         <p:spPr>
           <a:xfrm>
             <a:off x="6903720" y="1737360"/>
-            <a:ext cx="2011680" cy="2834640"/>
+            <a:ext cx="2011680" cy="1978429"/>
           </a:xfrm>
           <a:prstGeom prst="rect">
             <a:avLst/>
@@ -2833,7 +2778,7 @@
         <p:spPr>
           <a:xfrm>
             <a:off x="6903720" y="1737360"/>
-            <a:ext cx="64008" cy="2834640"/>
+            <a:ext cx="64008" cy="1980000"/>
           </a:xfrm>
           <a:prstGeom prst="rect">
             <a:avLst/>
@@ -2971,8 +2916,8 @@
         </p:nvSpPr>
         <p:spPr>
           <a:xfrm>
-            <a:off x="457200" y="4663440"/>
-            <a:ext cx="8229600" cy="347472"/>
+            <a:off x="457200" y="3772129"/>
+            <a:ext cx="4155948" cy="1157963"/>
           </a:xfrm>
           <a:prstGeom prst="rect">
             <a:avLst/>
@@ -2991,8 +2936,8 @@
         </p:nvSpPr>
         <p:spPr>
           <a:xfrm>
-            <a:off x="457200" y="4663440"/>
-            <a:ext cx="8229600" cy="347472"/>
+            <a:off x="457200" y="4582620"/>
+            <a:ext cx="4155948" cy="347472"/>
           </a:xfrm>
           <a:prstGeom prst="rect">
             <a:avLst/>
@@ -3013,9 +2958,263 @@
                   <a:srgbClr val="FFFFFF"/>
                 </a:solidFill>
               </a:rPr>
-              <a:t>23 % des dossiers falsifiés à Paris et petite couronne · +20 % en province en un an   —   Source : Imodirect / facilogi.com, 2024</a:t>
+              <a:t>des dossiers falsifiés à Paris et petite couronne</a:t>
+            </a:r>
+            <a:endParaRPr lang="en-US" sz="1100" dirty="0">
+              <a:solidFill>
+                <a:srgbClr val="64748B"/>
+              </a:solidFill>
+              <a:latin typeface="Calibri" pitchFamily="34" charset="0"/>
+              <a:cs typeface="Calibri" pitchFamily="34" charset="-120"/>
+            </a:endParaRPr>
+          </a:p>
+        </p:txBody>
+      </p:sp>
+      <p:sp>
+        <p:nvSpPr>
+          <p:cNvPr id="27" name="Text 5">
+            <a:extLst>
+              <a:ext uri="{FF2B5EF4-FFF2-40B4-BE49-F238E27FC236}">
+                <a16:creationId xmlns:a16="http://schemas.microsoft.com/office/drawing/2014/main" id="{ABD4D30E-70F8-AF47-3A75-104860762A3E}"/>
+              </a:ext>
+            </a:extLst>
+          </p:cNvPr>
+          <p:cNvSpPr/>
+          <p:nvPr/>
+        </p:nvSpPr>
+        <p:spPr>
+          <a:xfrm>
+            <a:off x="457201" y="3726409"/>
+            <a:ext cx="4146576" cy="1005840"/>
+          </a:xfrm>
+          <a:prstGeom prst="rect">
+            <a:avLst/>
+          </a:prstGeom>
+          <a:noFill/>
+          <a:ln/>
+        </p:spPr>
+        <p:txBody>
+          <a:bodyPr wrap="square" rtlCol="0" anchor="ctr"/>
+          <a:lstStyle/>
+          <a:p>
+            <a:pPr marL="0" indent="0" algn="ctr">
+              <a:buNone/>
+            </a:pPr>
+            <a:r>
+              <a:rPr lang="en-US" sz="7200" b="1" dirty="0">
+                <a:solidFill>
+                  <a:srgbClr val="02C39A"/>
+                </a:solidFill>
+                <a:latin typeface="Calibri" pitchFamily="34" charset="0"/>
+                <a:ea typeface="Calibri" pitchFamily="34" charset="-122"/>
+                <a:cs typeface="Calibri" pitchFamily="34" charset="-120"/>
+              </a:rPr>
+              <a:t>23%</a:t>
+            </a:r>
+            <a:endParaRPr lang="en-US" sz="7200" dirty="0"/>
+          </a:p>
+        </p:txBody>
+      </p:sp>
+      <p:sp>
+        <p:nvSpPr>
+          <p:cNvPr id="28" name="Shape 19">
+            <a:extLst>
+              <a:ext uri="{FF2B5EF4-FFF2-40B4-BE49-F238E27FC236}">
+                <a16:creationId xmlns:a16="http://schemas.microsoft.com/office/drawing/2014/main" id="{0C5AD8D9-0CFC-C658-B105-27A3D334B3C5}"/>
+              </a:ext>
+            </a:extLst>
+          </p:cNvPr>
+          <p:cNvSpPr/>
+          <p:nvPr/>
+        </p:nvSpPr>
+        <p:spPr>
+          <a:xfrm>
+            <a:off x="4754880" y="3782451"/>
+            <a:ext cx="4160520" cy="1157963"/>
+          </a:xfrm>
+          <a:prstGeom prst="rect">
+            <a:avLst/>
+          </a:prstGeom>
+          <a:solidFill>
+            <a:srgbClr val="0D2137"/>
+          </a:solidFill>
+          <a:ln/>
+        </p:spPr>
+      </p:sp>
+      <p:sp>
+        <p:nvSpPr>
+          <p:cNvPr id="29" name="Text 20">
+            <a:extLst>
+              <a:ext uri="{FF2B5EF4-FFF2-40B4-BE49-F238E27FC236}">
+                <a16:creationId xmlns:a16="http://schemas.microsoft.com/office/drawing/2014/main" id="{85074E96-568E-5182-D511-A81D1BDF5520}"/>
+              </a:ext>
+            </a:extLst>
+          </p:cNvPr>
+          <p:cNvSpPr/>
+          <p:nvPr/>
+        </p:nvSpPr>
+        <p:spPr>
+          <a:xfrm>
+            <a:off x="4754880" y="4592942"/>
+            <a:ext cx="4160520" cy="347472"/>
+          </a:xfrm>
+          <a:prstGeom prst="rect">
+            <a:avLst/>
+          </a:prstGeom>
+          <a:noFill/>
+          <a:ln/>
+        </p:spPr>
+        <p:txBody>
+          <a:bodyPr wrap="square" lIns="0" tIns="0" rIns="0" bIns="0" rtlCol="0" anchor="ctr"/>
+          <a:lstStyle/>
+          <a:p>
+            <a:pPr marL="0" indent="0" algn="ctr">
+              <a:buNone/>
+            </a:pPr>
+            <a:r>
+              <a:rPr lang="en-US" sz="1050" i="1" dirty="0" err="1">
+                <a:solidFill>
+                  <a:srgbClr val="FFFFFF"/>
+                </a:solidFill>
+              </a:rPr>
+              <a:t>en</a:t>
+            </a:r>
+            <a:r>
+              <a:rPr lang="en-US" sz="1050" i="1" dirty="0">
+                <a:solidFill>
+                  <a:srgbClr val="FFFFFF"/>
+                </a:solidFill>
+              </a:rPr>
+              <a:t> province en un an </a:t>
             </a:r>
             <a:endParaRPr lang="en-US" sz="1050" dirty="0"/>
+          </a:p>
+        </p:txBody>
+      </p:sp>
+      <p:sp>
+        <p:nvSpPr>
+          <p:cNvPr id="30" name="Text 5">
+            <a:extLst>
+              <a:ext uri="{FF2B5EF4-FFF2-40B4-BE49-F238E27FC236}">
+                <a16:creationId xmlns:a16="http://schemas.microsoft.com/office/drawing/2014/main" id="{9B7B89AD-5FAB-C566-FE4B-EB28EA734F81}"/>
+              </a:ext>
+            </a:extLst>
+          </p:cNvPr>
+          <p:cNvSpPr/>
+          <p:nvPr/>
+        </p:nvSpPr>
+        <p:spPr>
+          <a:xfrm>
+            <a:off x="4754880" y="3736731"/>
+            <a:ext cx="4160520" cy="1005840"/>
+          </a:xfrm>
+          <a:prstGeom prst="rect">
+            <a:avLst/>
+          </a:prstGeom>
+          <a:noFill/>
+          <a:ln/>
+        </p:spPr>
+        <p:txBody>
+          <a:bodyPr wrap="square" rtlCol="0" anchor="ctr"/>
+          <a:lstStyle/>
+          <a:p>
+            <a:pPr marL="0" indent="0" algn="ctr">
+              <a:buNone/>
+            </a:pPr>
+            <a:r>
+              <a:rPr lang="en-US" sz="7200" b="1" dirty="0">
+                <a:solidFill>
+                  <a:srgbClr val="02C39A"/>
+                </a:solidFill>
+                <a:latin typeface="Calibri" pitchFamily="34" charset="0"/>
+                <a:ea typeface="Calibri" pitchFamily="34" charset="-122"/>
+                <a:cs typeface="Calibri" pitchFamily="34" charset="-120"/>
+              </a:rPr>
+              <a:t>+20%</a:t>
+            </a:r>
+            <a:endParaRPr lang="en-US" sz="7200" dirty="0"/>
+          </a:p>
+        </p:txBody>
+      </p:sp>
+      <p:sp>
+        <p:nvSpPr>
+          <p:cNvPr id="32" name="ZoneTexte 31">
+            <a:extLst>
+              <a:ext uri="{FF2B5EF4-FFF2-40B4-BE49-F238E27FC236}">
+                <a16:creationId xmlns:a16="http://schemas.microsoft.com/office/drawing/2014/main" id="{E9F83A48-57A0-8470-7235-42619F5A3A31}"/>
+              </a:ext>
+            </a:extLst>
+          </p:cNvPr>
+          <p:cNvSpPr txBox="1"/>
+          <p:nvPr/>
+        </p:nvSpPr>
+        <p:spPr>
+          <a:xfrm>
+            <a:off x="6816852" y="4887801"/>
+            <a:ext cx="2240280" cy="246221"/>
+          </a:xfrm>
+          <a:prstGeom prst="rect">
+            <a:avLst/>
+          </a:prstGeom>
+          <a:noFill/>
+        </p:spPr>
+        <p:txBody>
+          <a:bodyPr wrap="square">
+            <a:spAutoFit/>
+          </a:bodyPr>
+          <a:lstStyle/>
+          <a:p>
+            <a:r>
+              <a:rPr lang="en-US" sz="1000" dirty="0">
+                <a:solidFill>
+                  <a:srgbClr val="64748B"/>
+                </a:solidFill>
+                <a:latin typeface="Calibri" pitchFamily="34" charset="0"/>
+                <a:cs typeface="Calibri" pitchFamily="34" charset="-120"/>
+              </a:rPr>
+              <a:t>Source : </a:t>
+            </a:r>
+            <a:r>
+              <a:rPr lang="en-US" sz="1000" dirty="0" err="1">
+                <a:solidFill>
+                  <a:srgbClr val="64748B"/>
+                </a:solidFill>
+                <a:latin typeface="Calibri" pitchFamily="34" charset="0"/>
+                <a:cs typeface="Calibri" pitchFamily="34" charset="-120"/>
+              </a:rPr>
+              <a:t>Imodirect</a:t>
+            </a:r>
+            <a:r>
+              <a:rPr lang="en-US" sz="1000" dirty="0">
+                <a:solidFill>
+                  <a:srgbClr val="64748B"/>
+                </a:solidFill>
+                <a:latin typeface="Calibri" pitchFamily="34" charset="0"/>
+                <a:cs typeface="Calibri" pitchFamily="34" charset="-120"/>
+              </a:rPr>
+              <a:t> / </a:t>
+            </a:r>
+            <a:r>
+              <a:rPr lang="en-US" sz="1000" dirty="0" err="1">
+                <a:solidFill>
+                  <a:srgbClr val="64748B"/>
+                </a:solidFill>
+                <a:latin typeface="Calibri" pitchFamily="34" charset="0"/>
+                <a:cs typeface="Calibri" pitchFamily="34" charset="-120"/>
+              </a:rPr>
+              <a:t>facilogi.com</a:t>
+            </a:r>
+            <a:r>
+              <a:rPr lang="en-US" sz="1000" dirty="0">
+                <a:solidFill>
+                  <a:srgbClr val="64748B"/>
+                </a:solidFill>
+                <a:latin typeface="Calibri" pitchFamily="34" charset="0"/>
+                <a:cs typeface="Calibri" pitchFamily="34" charset="-120"/>
+              </a:rPr>
+              <a:t>, 2024</a:t>
+            </a:r>
+            <a:endParaRPr lang="fr-FR" sz="1000" dirty="0"/>
           </a:p>
         </p:txBody>
       </p:sp>
@@ -3269,17 +3468,6 @@
             <a:pPr marL="0" indent="0" algn="ctr">
               <a:buNone/>
             </a:pPr>
-            <a:r>
-              <a:rPr lang="en-US" sz="1100" dirty="0">
-                <a:solidFill>
-                  <a:srgbClr val="FFFFFF"/>
-                </a:solidFill>
-                <a:latin typeface="Calibri" pitchFamily="34" charset="0"/>
-                <a:ea typeface="Calibri" pitchFamily="34" charset="-122"/>
-                <a:cs typeface="Calibri" pitchFamily="34" charset="-120"/>
-              </a:rPr>
-              <a:t>Locataire</a:t>
-            </a:r>
             <a:endParaRPr lang="en-US" sz="1100" dirty="0"/>
           </a:p>
           <a:p>

--- a/docs/PourAccord_PitchDeck_v2.pptx
+++ b/docs/PourAccord_PitchDeck_v2.pptx
@@ -2340,7 +2340,7 @@
               <a:buNone/>
             </a:pPr>
             <a:r>
-              <a:rPr lang="en-US" sz="1300" b="1" dirty="0">
+              <a:rPr lang="fr-FR" sz="1300" b="1" dirty="0">
                 <a:solidFill>
                   <a:srgbClr val="0D2137"/>
                 </a:solidFill>
@@ -2348,9 +2348,9 @@
                 <a:ea typeface="Calibri" pitchFamily="34" charset="-122"/>
                 <a:cs typeface="Calibri" pitchFamily="34" charset="-120"/>
               </a:rPr>
-              <a:t>30 min minimum</a:t>
-            </a:r>
-            <a:endParaRPr lang="en-US" sz="1300" dirty="0"/>
+              <a:t>30 min en moyenne</a:t>
+            </a:r>
+            <a:endParaRPr lang="fr-FR" sz="1300" dirty="0"/>
           </a:p>
         </p:txBody>
       </p:sp>
@@ -2877,7 +2877,7 @@
               <a:buNone/>
             </a:pPr>
             <a:r>
-              <a:rPr lang="en-US" sz="1100" dirty="0">
+              <a:rPr lang="fr-FR" sz="1100" dirty="0">
                 <a:solidFill>
                   <a:srgbClr val="64748B"/>
                 </a:solidFill>
@@ -2887,14 +2887,12 @@
               </a:rPr>
               <a:t>Stockage prolongé de données</a:t>
             </a:r>
-            <a:endParaRPr lang="en-US" sz="1100" dirty="0"/>
-          </a:p>
-          <a:p>
-            <a:pPr marL="0" indent="0">
-              <a:buNone/>
-            </a:pPr>
-            <a:r>
-              <a:rPr lang="en-US" sz="1100" dirty="0">
+            <a:r>
+              <a:rPr lang="fr-FR" sz="1100" dirty="0"/>
+              <a:t> </a:t>
+            </a:r>
+            <a:r>
+              <a:rPr lang="fr-FR" sz="1100" dirty="0">
                 <a:solidFill>
                   <a:srgbClr val="64748B"/>
                 </a:solidFill>
@@ -2904,7 +2902,7 @@
               </a:rPr>
               <a:t>personnelles sensibles</a:t>
             </a:r>
-            <a:endParaRPr lang="en-US" sz="1100" dirty="0"/>
+            <a:endParaRPr lang="fr-FR" sz="1100" dirty="0"/>
           </a:p>
         </p:txBody>
       </p:sp>
@@ -2917,7 +2915,7 @@
         <p:spPr>
           <a:xfrm>
             <a:off x="457200" y="3772129"/>
-            <a:ext cx="4155948" cy="1157963"/>
+            <a:ext cx="4224300" cy="1157963"/>
           </a:xfrm>
           <a:prstGeom prst="rect">
             <a:avLst/>
@@ -3072,7 +3070,7 @@
               <a:buNone/>
             </a:pPr>
             <a:r>
-              <a:rPr lang="en-US" sz="1050" i="1" dirty="0" err="1">
+              <a:rPr lang="fr-FR" sz="1050" i="1" dirty="0">
                 <a:solidFill>
                   <a:srgbClr val="FFFFFF"/>
                 </a:solidFill>
@@ -4900,7 +4898,7 @@
               <a:t>Suppression </a:t>
             </a:r>
             <a:r>
-              <a:rPr lang="en-US" sz="1050" dirty="0" err="1">
+              <a:rPr lang="fr-FR" sz="1050" dirty="0">
                 <a:solidFill>
                   <a:srgbClr val="64748B"/>
                 </a:solidFill>
@@ -7299,7 +7297,9 @@
           <a:prstGeom prst="rect">
             <a:avLst/>
           </a:prstGeom>
-          <a:noFill/>
+          <a:solidFill>
+            <a:srgbClr val="0C2136"/>
+          </a:solidFill>
           <a:ln/>
         </p:spPr>
         <p:txBody>
@@ -7431,7 +7431,9 @@
           <a:prstGeom prst="rect">
             <a:avLst/>
           </a:prstGeom>
-          <a:noFill/>
+          <a:solidFill>
+            <a:srgbClr val="0C2136"/>
+          </a:solidFill>
           <a:ln/>
         </p:spPr>
         <p:txBody>
@@ -7563,7 +7565,9 @@
           <a:prstGeom prst="rect">
             <a:avLst/>
           </a:prstGeom>
-          <a:noFill/>
+          <a:solidFill>
+            <a:srgbClr val="0C2136"/>
+          </a:solidFill>
           <a:ln/>
         </p:spPr>
         <p:txBody>
@@ -7655,7 +7659,7 @@
                   <a:srgbClr val="64748B"/>
                 </a:solidFill>
               </a:rPr>
-              <a:t>NIR, SIRET, MRZ vérifiés algorithmiquement</a:t>
+              <a:t>Ex : NIR, SIRET, MRZ… vérifiés algorithmiquement</a:t>
             </a:r>
             <a:endParaRPr lang="en-US" sz="1000" dirty="0"/>
           </a:p>
@@ -7695,7 +7699,9 @@
           <a:prstGeom prst="rect">
             <a:avLst/>
           </a:prstGeom>
-          <a:noFill/>
+          <a:solidFill>
+            <a:srgbClr val="0C2136"/>
+          </a:solidFill>
           <a:ln/>
         </p:spPr>
         <p:txBody>
@@ -7787,7 +7793,7 @@
                   <a:srgbClr val="64748B"/>
                 </a:solidFill>
               </a:rPr>
-              <a:t>Existence entreprise via API INSEE</a:t>
+              <a:t>Ex : Existence entreprise via API INSEE</a:t>
             </a:r>
             <a:endParaRPr lang="en-US" sz="1000" dirty="0"/>
           </a:p>
@@ -7827,7 +7833,9 @@
           <a:prstGeom prst="rect">
             <a:avLst/>
           </a:prstGeom>
-          <a:noFill/>
+          <a:solidFill>
+            <a:srgbClr val="0C2136"/>
+          </a:solidFill>
           <a:ln/>
         </p:spPr>
         <p:txBody>
@@ -7919,9 +7927,22 @@
                   <a:srgbClr val="64748B"/>
                 </a:solidFill>
               </a:rPr>
-              <a:t>Données cohérentes au sein d'un document</a:t>
-            </a:r>
-            <a:endParaRPr lang="en-US" sz="1000" dirty="0"/>
+              <a:t>Données cohérentes au sein d'un document </a:t>
+            </a:r>
+          </a:p>
+          <a:p>
+            <a:pPr marL="0" indent="0">
+              <a:buNone/>
+            </a:pPr>
+            <a:r>
+              <a:rPr lang="fr-FR" sz="800" dirty="0">
+                <a:solidFill>
+                  <a:srgbClr val="64748B"/>
+                </a:solidFill>
+              </a:rPr>
+              <a:t>Ex : cohérence des montants de la fiche de salaire</a:t>
+            </a:r>
+            <a:endParaRPr lang="fr-FR" sz="800" dirty="0"/>
           </a:p>
         </p:txBody>
       </p:sp>
@@ -7959,7 +7980,9 @@
           <a:prstGeom prst="rect">
             <a:avLst/>
           </a:prstGeom>
-          <a:noFill/>
+          <a:solidFill>
+            <a:srgbClr val="0C2136"/>
+          </a:solidFill>
           <a:ln/>
         </p:spPr>
         <p:txBody>
@@ -8091,7 +8114,9 @@
           <a:prstGeom prst="rect">
             <a:avLst/>
           </a:prstGeom>
-          <a:noFill/>
+          <a:solidFill>
+            <a:srgbClr val="0C2136"/>
+          </a:solidFill>
           <a:ln/>
         </p:spPr>
         <p:txBody>
@@ -8178,14 +8203,14 @@
               <a:buNone/>
             </a:pPr>
             <a:r>
-              <a:rPr lang="en-US" sz="1000" dirty="0">
+              <a:rPr lang="fr-FR" sz="1000" dirty="0">
                 <a:solidFill>
                   <a:srgbClr val="64748B"/>
                 </a:solidFill>
               </a:rPr>
-              <a:t>Détection métadonnées et altérations suspectes</a:t>
-            </a:r>
-            <a:endParaRPr lang="en-US" sz="1000" dirty="0"/>
+              <a:t>Détection métadonnées et altérations suspectes des documents</a:t>
+            </a:r>
+            <a:endParaRPr lang="fr-FR" sz="1000" dirty="0"/>
           </a:p>
         </p:txBody>
       </p:sp>
@@ -8198,7 +8223,7 @@
 </file>
 
 <file path=ppt/slides/slide7.xml><?xml version="1.0" encoding="utf-8"?>
-<p:sld xmlns:a="http://schemas.openxmlformats.org/drawingml/2006/main" xmlns:r="http://schemas.openxmlformats.org/officeDocument/2006/relationships" xmlns:p="http://schemas.openxmlformats.org/presentationml/2006/main">
+<p:sld xmlns:a="http://schemas.openxmlformats.org/drawingml/2006/main" xmlns:r="http://schemas.openxmlformats.org/officeDocument/2006/relationships" xmlns:p="http://schemas.openxmlformats.org/presentationml/2006/main" show="0">
   <p:cSld name="Slide 7">
     <p:bg>
       <p:bgPr>
@@ -9987,7 +10012,62 @@
                 <a:ea typeface="Calibri" pitchFamily="34" charset="-122"/>
                 <a:cs typeface="Calibri" pitchFamily="34" charset="-120"/>
               </a:rPr>
-              <a:t>De la beta à la plateforme de référence</a:t>
+              <a:t>De la beta </a:t>
+            </a:r>
+            <a:r>
+              <a:rPr lang="en-US" sz="2400" b="1" dirty="0" err="1">
+                <a:solidFill>
+                  <a:srgbClr val="FFFFFF"/>
+                </a:solidFill>
+                <a:latin typeface="Calibri" pitchFamily="34" charset="0"/>
+                <a:ea typeface="Calibri" pitchFamily="34" charset="-122"/>
+                <a:cs typeface="Calibri" pitchFamily="34" charset="-120"/>
+              </a:rPr>
+              <a:t>à</a:t>
+            </a:r>
+            <a:r>
+              <a:rPr lang="en-US" sz="2400" b="1" dirty="0">
+                <a:solidFill>
+                  <a:srgbClr val="FFFFFF"/>
+                </a:solidFill>
+                <a:latin typeface="Calibri" pitchFamily="34" charset="0"/>
+                <a:ea typeface="Calibri" pitchFamily="34" charset="-122"/>
+                <a:cs typeface="Calibri" pitchFamily="34" charset="-120"/>
+              </a:rPr>
+              <a:t> la </a:t>
+            </a:r>
+            <a:r>
+              <a:rPr lang="en-US" sz="2400" b="1" dirty="0" err="1">
+                <a:solidFill>
+                  <a:srgbClr val="FFFFFF"/>
+                </a:solidFill>
+                <a:latin typeface="Calibri" pitchFamily="34" charset="0"/>
+                <a:ea typeface="Calibri" pitchFamily="34" charset="-122"/>
+                <a:cs typeface="Calibri" pitchFamily="34" charset="-120"/>
+              </a:rPr>
+              <a:t>plateforme</a:t>
+            </a:r>
+            <a:r>
+              <a:rPr lang="en-US" sz="2400" b="1" dirty="0">
+                <a:solidFill>
+                  <a:srgbClr val="FFFFFF"/>
+                </a:solidFill>
+                <a:latin typeface="Calibri" pitchFamily="34" charset="0"/>
+                <a:ea typeface="Calibri" pitchFamily="34" charset="-122"/>
+                <a:cs typeface="Calibri" pitchFamily="34" charset="-120"/>
+              </a:rPr>
+              <a:t> de </a:t>
+            </a:r>
+            <a:r>
+              <a:rPr lang="en-US" sz="2400" b="1" dirty="0" err="1">
+                <a:solidFill>
+                  <a:srgbClr val="FFFFFF"/>
+                </a:solidFill>
+                <a:latin typeface="Calibri" pitchFamily="34" charset="0"/>
+                <a:ea typeface="Calibri" pitchFamily="34" charset="-122"/>
+                <a:cs typeface="Calibri" pitchFamily="34" charset="-120"/>
+              </a:rPr>
+              <a:t>référence</a:t>
             </a:r>
             <a:endParaRPr lang="en-US" sz="2400" dirty="0"/>
           </a:p>
@@ -11592,6 +11672,45 @@
               <a:t>International</a:t>
             </a:r>
             <a:endParaRPr lang="en-US" sz="1050" dirty="0"/>
+          </a:p>
+        </p:txBody>
+      </p:sp>
+      <p:sp>
+        <p:nvSpPr>
+          <p:cNvPr id="60" name="ZoneTexte 59">
+            <a:extLst>
+              <a:ext uri="{FF2B5EF4-FFF2-40B4-BE49-F238E27FC236}">
+                <a16:creationId xmlns:a16="http://schemas.microsoft.com/office/drawing/2014/main" id="{702FA9E2-417D-9CCC-3C3B-1F7A7A9B7A8F}"/>
+              </a:ext>
+            </a:extLst>
+          </p:cNvPr>
+          <p:cNvSpPr txBox="1"/>
+          <p:nvPr/>
+        </p:nvSpPr>
+        <p:spPr>
+          <a:xfrm rot="19656771">
+            <a:off x="865830" y="1228300"/>
+            <a:ext cx="6991722" cy="2215991"/>
+          </a:xfrm>
+          <a:prstGeom prst="rect">
+            <a:avLst/>
+          </a:prstGeom>
+          <a:noFill/>
+        </p:spPr>
+        <p:txBody>
+          <a:bodyPr wrap="none" rtlCol="0">
+            <a:spAutoFit/>
+          </a:bodyPr>
+          <a:lstStyle/>
+          <a:p>
+            <a:r>
+              <a:rPr lang="fr-FR" sz="13800" dirty="0">
+                <a:solidFill>
+                  <a:schemeClr val="bg1"/>
+                </a:solidFill>
+              </a:rPr>
+              <a:t>A REVOIR</a:t>
+            </a:r>
           </a:p>
         </p:txBody>
       </p:sp>
